--- a/발표자료/2차 프로젝트 발표 - 2022184007 김성민.pptx
+++ b/발표자료/2차 프로젝트 발표 - 2022184007 김성민.pptx
@@ -3446,187 +3446,7 @@
           <a:graphicData uri="http://schemas.openxmlformats.org/drawingml/2006/table">
             <a:tbl>
               <a:tblPr firstRow="1" bandRow="1">
-                <a:tableStyle styleId="{01A66EDD-3DAB-4C5B-A090-DC80EC1FD486}" styleName="Normal Style 1 - Accent 1">
-                  <a:wholeTbl>
-                    <a:tcTxStyle>
-                      <a:fontRef idx="minor">
-                        <a:prstClr val="black"/>
-                      </a:fontRef>
-                      <a:schemeClr val="dk1"/>
-                    </a:tcTxStyle>
-                    <a:tcStyle>
-                      <a:tcBdr>
-                        <a:left>
-                          <a:ln w="12700" cmpd="sng">
-                            <a:solidFill>
-                              <a:schemeClr val="lt1"/>
-                            </a:solidFill>
-                          </a:ln>
-                        </a:left>
-                        <a:right>
-                          <a:ln w="12700" cmpd="sng">
-                            <a:solidFill>
-                              <a:schemeClr val="lt1"/>
-                            </a:solidFill>
-                          </a:ln>
-                        </a:right>
-                        <a:top>
-                          <a:ln w="12700" cmpd="sng">
-                            <a:solidFill>
-                              <a:schemeClr val="lt1"/>
-                            </a:solidFill>
-                          </a:ln>
-                        </a:top>
-                        <a:bottom>
-                          <a:ln w="12700" cmpd="sng">
-                            <a:solidFill>
-                              <a:schemeClr val="lt1"/>
-                            </a:solidFill>
-                          </a:ln>
-                        </a:bottom>
-                        <a:insideH>
-                          <a:ln w="12700" cmpd="sng">
-                            <a:solidFill>
-                              <a:schemeClr val="lt1"/>
-                            </a:solidFill>
-                          </a:ln>
-                        </a:insideH>
-                        <a:insideV>
-                          <a:ln w="12700" cmpd="sng">
-                            <a:solidFill>
-                              <a:schemeClr val="lt1"/>
-                            </a:solidFill>
-                          </a:ln>
-                        </a:insideV>
-                      </a:tcBdr>
-                      <a:fill>
-                        <a:solidFill>
-                          <a:schemeClr val="accent1">
-                            <a:lum val="90000"/>
-                          </a:schemeClr>
-                        </a:solidFill>
-                      </a:fill>
-                    </a:tcStyle>
-                  </a:wholeTbl>
-                  <a:band1H>
-                    <a:tcTxStyle/>
-                    <a:tcStyle>
-                      <a:tcBdr/>
-                      <a:fill>
-                        <a:solidFill>
-                          <a:schemeClr val="accent1">
-                            <a:lum val="80000"/>
-                          </a:schemeClr>
-                        </a:solidFill>
-                      </a:fill>
-                    </a:tcStyle>
-                  </a:band1H>
-                  <a:band2H>
-                    <a:tcTxStyle/>
-                    <a:tcStyle>
-                      <a:tcBdr/>
-                    </a:tcStyle>
-                  </a:band2H>
-                  <a:band1V>
-                    <a:tcTxStyle/>
-                    <a:tcStyle>
-                      <a:tcBdr/>
-                      <a:fill>
-                        <a:solidFill>
-                          <a:schemeClr val="accent1">
-                            <a:lum val="80000"/>
-                          </a:schemeClr>
-                        </a:solidFill>
-                      </a:fill>
-                    </a:tcStyle>
-                  </a:band1V>
-                  <a:band2V>
-                    <a:tcTxStyle/>
-                    <a:tcStyle>
-                      <a:tcBdr/>
-                    </a:tcStyle>
-                  </a:band2V>
-                  <a:lastCol>
-                    <a:tcTxStyle b="on">
-                      <a:fontRef idx="minor">
-                        <a:prstClr val="black"/>
-                      </a:fontRef>
-                      <a:schemeClr val="lt1"/>
-                    </a:tcTxStyle>
-                    <a:tcStyle>
-                      <a:tcBdr/>
-                      <a:fill>
-                        <a:solidFill>
-                          <a:schemeClr val="accent1"/>
-                        </a:solidFill>
-                      </a:fill>
-                    </a:tcStyle>
-                  </a:lastCol>
-                  <a:firstCol>
-                    <a:tcTxStyle b="on">
-                      <a:fontRef idx="minor">
-                        <a:prstClr val="black"/>
-                      </a:fontRef>
-                      <a:schemeClr val="lt1"/>
-                    </a:tcTxStyle>
-                    <a:tcStyle>
-                      <a:tcBdr/>
-                      <a:fill>
-                        <a:solidFill>
-                          <a:schemeClr val="accent1"/>
-                        </a:solidFill>
-                      </a:fill>
-                    </a:tcStyle>
-                  </a:firstCol>
-                  <a:lastRow>
-                    <a:tcTxStyle b="on">
-                      <a:fontRef idx="minor">
-                        <a:prstClr val="black"/>
-                      </a:fontRef>
-                      <a:schemeClr val="lt1"/>
-                    </a:tcTxStyle>
-                    <a:tcStyle>
-                      <a:tcBdr>
-                        <a:top>
-                          <a:ln w="38100" cmpd="sng">
-                            <a:solidFill>
-                              <a:schemeClr val="lt1"/>
-                            </a:solidFill>
-                          </a:ln>
-                        </a:top>
-                      </a:tcBdr>
-                      <a:fill>
-                        <a:solidFill>
-                          <a:schemeClr val="accent1"/>
-                        </a:solidFill>
-                      </a:fill>
-                    </a:tcStyle>
-                  </a:lastRow>
-                  <a:firstRow>
-                    <a:tcTxStyle b="on">
-                      <a:fontRef idx="minor">
-                        <a:prstClr val="black"/>
-                      </a:fontRef>
-                      <a:schemeClr val="lt1"/>
-                    </a:tcTxStyle>
-                    <a:tcStyle>
-                      <a:tcBdr>
-                        <a:bottom>
-                          <a:ln w="38100" cmpd="sng">
-                            <a:solidFill>
-                              <a:schemeClr val="lt1"/>
-                            </a:solidFill>
-                          </a:ln>
-                        </a:bottom>
-                      </a:tcBdr>
-                      <a:fill>
-                        <a:solidFill>
-                          <a:schemeClr val="accent1"/>
-                        </a:solidFill>
-                      </a:fill>
-                    </a:tcStyle>
-                  </a:firstRow>
-                </a:tableStyle>
+                <a:tableStyleId>{01A66EDD-3DAB-4C5B-A090-DC80EC1FD486}</a:tableStyleId>
               </a:tblPr>
               <a:tblGrid>
                 <a:gridCol w="2174431"/>
@@ -4290,9 +4110,33 @@
                             <a:schemeClr val="lt1"/>
                           </a:solidFill>
                         </a:rPr>
-                        <a:t> 플레이 테스트</a:t>
-                      </a:r>
-                      <a:endParaRPr lang="ko-KR" altLang="en-US" sz="1600">
+                        <a:t> 플레이 테스트 </a:t>
+                      </a:r>
+                      <a:r>
+                        <a:rPr lang="en-US" altLang="ko-KR" sz="1600">
+                          <a:solidFill>
+                            <a:schemeClr val="lt1"/>
+                          </a:solidFill>
+                        </a:rPr>
+                        <a:t>-</a:t>
+                      </a:r>
+                      <a:r>
+                        <a:rPr lang="ko-KR" altLang="en-US" sz="1600">
+                          <a:solidFill>
+                            <a:schemeClr val="lt1"/>
+                          </a:solidFill>
+                        </a:rPr>
+                        <a:t> </a:t>
+                      </a:r>
+                      <a:r>
+                        <a:rPr lang="en-US" altLang="ko-KR" sz="1600">
+                          <a:solidFill>
+                            <a:schemeClr val="lt1"/>
+                          </a:solidFill>
+                        </a:rPr>
+                        <a:t>100%</a:t>
+                      </a:r>
+                      <a:endParaRPr lang="en-US" altLang="ko-KR" sz="1600">
                         <a:solidFill>
                           <a:schemeClr val="lt1"/>
                         </a:solidFill>
